--- a/schools-presentations/A Lykeiou/alloglossoi/A.5.M2 Network Diagnostics - Part 1 - English.pptx
+++ b/schools-presentations/A Lykeiou/alloglossoi/A.5.M2 Network Diagnostics - Part 1 - English.pptx
@@ -135,8 +135,8 @@
 <pc:chgInfo xmlns:a="http://schemas.openxmlformats.org/drawingml/2006/main" xmlns:r="http://schemas.openxmlformats.org/officeDocument/2006/relationships" xmlns:ac="http://schemas.microsoft.com/office/drawing/2013/main/command" xmlns:pc="http://schemas.microsoft.com/office/powerpoint/2013/main/command">
   <pc:docChgLst>
     <pc:chgData name="Άριστος Αρέστη" userId="813aa191-2d4c-464f-9d05-0a7e494d859f" providerId="ADAL" clId="{49C7B61D-1ACF-4AFF-A04E-A3B433E32474}"/>
-    <pc:docChg chg="modSld">
-      <pc:chgData name="Άριστος Αρέστη" userId="813aa191-2d4c-464f-9d05-0a7e494d859f" providerId="ADAL" clId="{49C7B61D-1ACF-4AFF-A04E-A3B433E32474}" dt="2026-10-13T13:17:08.147" v="0" actId="14100"/>
+    <pc:docChg chg="custSel modSld">
+      <pc:chgData name="Άριστος Αρέστη" userId="813aa191-2d4c-464f-9d05-0a7e494d859f" providerId="ADAL" clId="{49C7B61D-1ACF-4AFF-A04E-A3B433E32474}" dt="2026-10-14T18:29:10.122" v="22" actId="14100"/>
       <pc:docMkLst>
         <pc:docMk/>
       </pc:docMkLst>
@@ -152,6 +152,84 @@
             <pc:docMk/>
             <pc:sldMk cId="2371128756" sldId="258"/>
             <ac:picMk id="6" creationId="{C7F65D54-B296-40AB-B22A-5158BC2B66AE}"/>
+          </ac:picMkLst>
+        </pc:picChg>
+      </pc:sldChg>
+      <pc:sldChg chg="modSp mod">
+        <pc:chgData name="Άριστος Αρέστη" userId="813aa191-2d4c-464f-9d05-0a7e494d859f" providerId="ADAL" clId="{49C7B61D-1ACF-4AFF-A04E-A3B433E32474}" dt="2026-10-14T18:27:50.793" v="9" actId="20577"/>
+        <pc:sldMkLst>
+          <pc:docMk/>
+          <pc:sldMk cId="2842868052" sldId="259"/>
+        </pc:sldMkLst>
+        <pc:spChg chg="mod">
+          <ac:chgData name="Άριστος Αρέστη" userId="813aa191-2d4c-464f-9d05-0a7e494d859f" providerId="ADAL" clId="{49C7B61D-1ACF-4AFF-A04E-A3B433E32474}" dt="2026-10-14T18:27:13.069" v="1" actId="13926"/>
+          <ac:spMkLst>
+            <pc:docMk/>
+            <pc:sldMk cId="2842868052" sldId="259"/>
+            <ac:spMk id="41" creationId="{5DCE5C69-A305-40F9-A980-FACB9EDD9A99}"/>
+          </ac:spMkLst>
+        </pc:spChg>
+        <pc:spChg chg="mod">
+          <ac:chgData name="Άριστος Αρέστη" userId="813aa191-2d4c-464f-9d05-0a7e494d859f" providerId="ADAL" clId="{49C7B61D-1ACF-4AFF-A04E-A3B433E32474}" dt="2026-10-14T18:27:50.793" v="9" actId="20577"/>
+          <ac:spMkLst>
+            <pc:docMk/>
+            <pc:sldMk cId="2842868052" sldId="259"/>
+            <ac:spMk id="42" creationId="{2F16AD20-5B5D-40C5-854C-B8018814BE88}"/>
+          </ac:spMkLst>
+        </pc:spChg>
+      </pc:sldChg>
+      <pc:sldChg chg="addSp delSp modSp mod">
+        <pc:chgData name="Άριστος Αρέστη" userId="813aa191-2d4c-464f-9d05-0a7e494d859f" providerId="ADAL" clId="{49C7B61D-1ACF-4AFF-A04E-A3B433E32474}" dt="2026-10-14T18:29:10.122" v="22" actId="14100"/>
+        <pc:sldMkLst>
+          <pc:docMk/>
+          <pc:sldMk cId="1459875993" sldId="260"/>
+        </pc:sldMkLst>
+        <pc:spChg chg="mod">
+          <ac:chgData name="Άριστος Αρέστη" userId="813aa191-2d4c-464f-9d05-0a7e494d859f" providerId="ADAL" clId="{49C7B61D-1ACF-4AFF-A04E-A3B433E32474}" dt="2026-10-14T18:29:10.122" v="22" actId="14100"/>
+          <ac:spMkLst>
+            <pc:docMk/>
+            <pc:sldMk cId="1459875993" sldId="260"/>
+            <ac:spMk id="42" creationId="{C7D3B068-2128-41C6-A0FD-A999E6AFB893}"/>
+          </ac:spMkLst>
+        </pc:spChg>
+        <pc:spChg chg="mod">
+          <ac:chgData name="Άριστος Αρέστη" userId="813aa191-2d4c-464f-9d05-0a7e494d859f" providerId="ADAL" clId="{49C7B61D-1ACF-4AFF-A04E-A3B433E32474}" dt="2026-10-14T18:28:28.522" v="15" actId="20577"/>
+          <ac:spMkLst>
+            <pc:docMk/>
+            <pc:sldMk cId="1459875993" sldId="260"/>
+            <ac:spMk id="43" creationId="{5F1268BA-118F-4566-B3D6-DDC54238DF3E}"/>
+          </ac:spMkLst>
+        </pc:spChg>
+        <pc:spChg chg="mod">
+          <ac:chgData name="Άριστος Αρέστη" userId="813aa191-2d4c-464f-9d05-0a7e494d859f" providerId="ADAL" clId="{49C7B61D-1ACF-4AFF-A04E-A3B433E32474}" dt="2026-10-14T18:29:01.699" v="20" actId="14100"/>
+          <ac:spMkLst>
+            <pc:docMk/>
+            <pc:sldMk cId="1459875993" sldId="260"/>
+            <ac:spMk id="44" creationId="{044970C1-BA81-4BB7-8366-C066860304E7}"/>
+          </ac:spMkLst>
+        </pc:spChg>
+        <pc:spChg chg="mod">
+          <ac:chgData name="Άριστος Αρέστη" userId="813aa191-2d4c-464f-9d05-0a7e494d859f" providerId="ADAL" clId="{49C7B61D-1ACF-4AFF-A04E-A3B433E32474}" dt="2026-10-14T18:29:05.641" v="21" actId="14100"/>
+          <ac:spMkLst>
+            <pc:docMk/>
+            <pc:sldMk cId="1459875993" sldId="260"/>
+            <ac:spMk id="46" creationId="{3B91EBAE-5013-43F6-90FD-77B279903BA1}"/>
+          </ac:spMkLst>
+        </pc:spChg>
+        <pc:picChg chg="add mod">
+          <ac:chgData name="Άριστος Αρέστη" userId="813aa191-2d4c-464f-9d05-0a7e494d859f" providerId="ADAL" clId="{49C7B61D-1ACF-4AFF-A04E-A3B433E32474}" dt="2026-10-14T18:28:53.059" v="18" actId="1076"/>
+          <ac:picMkLst>
+            <pc:docMk/>
+            <pc:sldMk cId="1459875993" sldId="260"/>
+            <ac:picMk id="5" creationId="{AE124AA7-9701-D3C5-CA9E-87D6F3BE66CF}"/>
+          </ac:picMkLst>
+        </pc:picChg>
+        <pc:picChg chg="del">
+          <ac:chgData name="Άριστος Αρέστη" userId="813aa191-2d4c-464f-9d05-0a7e494d859f" providerId="ADAL" clId="{49C7B61D-1ACF-4AFF-A04E-A3B433E32474}" dt="2026-10-14T18:28:42.937" v="16" actId="478"/>
+          <ac:picMkLst>
+            <pc:docMk/>
+            <pc:sldMk cId="1459875993" sldId="260"/>
+            <ac:picMk id="77" creationId="{B8FAD646-D99C-497E-94BD-E84B1AEED594}"/>
           </ac:picMkLst>
         </pc:picChg>
       </pc:sldChg>
@@ -1921,7 +1999,7 @@
           <a:lstStyle/>
           <a:p>
             <a:fld id="{0E1AB97B-D0C7-4CCB-8568-F47C13D538D5}" type="datetimeFigureOut">
-              <a:t>13-Oct-26</a:t>
+              <a:t>14-Oct-26</a:t>
             </a:fld>
             <a:endParaRPr/>
           </a:p>
@@ -2195,7 +2273,7 @@
           <a:lstStyle/>
           <a:p>
             <a:fld id="{0E1AB97B-D0C7-4CCB-8568-F47C13D538D5}" type="datetimeFigureOut">
-              <a:t>13-Oct-26</a:t>
+              <a:t>14-Oct-26</a:t>
             </a:fld>
             <a:endParaRPr/>
           </a:p>
@@ -2539,7 +2617,7 @@
           <a:lstStyle/>
           <a:p>
             <a:fld id="{0E1AB97B-D0C7-4CCB-8568-F47C13D538D5}" type="datetimeFigureOut">
-              <a:t>13-Oct-26</a:t>
+              <a:t>14-Oct-26</a:t>
             </a:fld>
             <a:endParaRPr/>
           </a:p>
@@ -2917,7 +2995,7 @@
           <a:lstStyle/>
           <a:p>
             <a:fld id="{0E1AB97B-D0C7-4CCB-8568-F47C13D538D5}" type="datetimeFigureOut">
-              <a:t>13-Oct-26</a:t>
+              <a:t>14-Oct-26</a:t>
             </a:fld>
             <a:endParaRPr/>
           </a:p>
@@ -3261,7 +3339,7 @@
           <a:lstStyle/>
           <a:p>
             <a:fld id="{0E1AB97B-D0C7-4CCB-8568-F47C13D538D5}" type="datetimeFigureOut">
-              <a:t>13-Oct-26</a:t>
+              <a:t>14-Oct-26</a:t>
             </a:fld>
             <a:endParaRPr/>
           </a:p>
@@ -3706,7 +3784,7 @@
           <a:lstStyle/>
           <a:p>
             <a:fld id="{0E1AB97B-D0C7-4CCB-8568-F47C13D538D5}" type="datetimeFigureOut">
-              <a:t>13-Oct-26</a:t>
+              <a:t>14-Oct-26</a:t>
             </a:fld>
             <a:endParaRPr/>
           </a:p>
@@ -3901,7 +3979,7 @@
           <a:lstStyle/>
           <a:p>
             <a:fld id="{0E1AB97B-D0C7-4CCB-8568-F47C13D538D5}" type="datetimeFigureOut">
-              <a:t>13-Oct-26</a:t>
+              <a:t>14-Oct-26</a:t>
             </a:fld>
             <a:endParaRPr/>
           </a:p>
@@ -4106,7 +4184,7 @@
           <a:lstStyle/>
           <a:p>
             <a:fld id="{0E1AB97B-D0C7-4CCB-8568-F47C13D538D5}" type="datetimeFigureOut">
-              <a:t>13-Oct-26</a:t>
+              <a:t>14-Oct-26</a:t>
             </a:fld>
             <a:endParaRPr/>
           </a:p>
@@ -4301,7 +4379,7 @@
           <a:lstStyle/>
           <a:p>
             <a:fld id="{0E1AB97B-D0C7-4CCB-8568-F47C13D538D5}" type="datetimeFigureOut">
-              <a:t>13-Oct-26</a:t>
+              <a:t>14-Oct-26</a:t>
             </a:fld>
             <a:endParaRPr/>
           </a:p>
@@ -4571,7 +4649,7 @@
           <a:lstStyle/>
           <a:p>
             <a:fld id="{0E1AB97B-D0C7-4CCB-8568-F47C13D538D5}" type="datetimeFigureOut">
-              <a:t>13-Oct-26</a:t>
+              <a:t>14-Oct-26</a:t>
             </a:fld>
             <a:endParaRPr/>
           </a:p>
@@ -4838,7 +4916,7 @@
           <a:lstStyle/>
           <a:p>
             <a:fld id="{0E1AB97B-D0C7-4CCB-8568-F47C13D538D5}" type="datetimeFigureOut">
-              <a:t>13-Oct-26</a:t>
+              <a:t>14-Oct-26</a:t>
             </a:fld>
             <a:endParaRPr/>
           </a:p>
@@ -5262,7 +5340,7 @@
           <a:lstStyle/>
           <a:p>
             <a:fld id="{0E1AB97B-D0C7-4CCB-8568-F47C13D538D5}" type="datetimeFigureOut">
-              <a:t>13-Oct-26</a:t>
+              <a:t>14-Oct-26</a:t>
             </a:fld>
             <a:endParaRPr/>
           </a:p>
@@ -5400,7 +5478,7 @@
           <a:lstStyle/>
           <a:p>
             <a:fld id="{0E1AB97B-D0C7-4CCB-8568-F47C13D538D5}" type="datetimeFigureOut">
-              <a:t>13-Oct-26</a:t>
+              <a:t>14-Oct-26</a:t>
             </a:fld>
             <a:endParaRPr/>
           </a:p>
@@ -5506,7 +5584,7 @@
           <a:lstStyle/>
           <a:p>
             <a:fld id="{0E1AB97B-D0C7-4CCB-8568-F47C13D538D5}" type="datetimeFigureOut">
-              <a:t>13-Oct-26</a:t>
+              <a:t>14-Oct-26</a:t>
             </a:fld>
             <a:endParaRPr/>
           </a:p>
@@ -5794,7 +5872,7 @@
           <a:lstStyle/>
           <a:p>
             <a:fld id="{0E1AB97B-D0C7-4CCB-8568-F47C13D538D5}" type="datetimeFigureOut">
-              <a:t>13-Oct-26</a:t>
+              <a:t>14-Oct-26</a:t>
             </a:fld>
             <a:endParaRPr/>
           </a:p>
@@ -6137,7 +6215,7 @@
           <a:lstStyle/>
           <a:p>
             <a:fld id="{0E1AB97B-D0C7-4CCB-8568-F47C13D538D5}" type="datetimeFigureOut">
-              <a:t>13-Oct-26</a:t>
+              <a:t>14-Oct-26</a:t>
             </a:fld>
             <a:endParaRPr/>
           </a:p>
@@ -6981,7 +7059,7 @@
           </a:lstStyle>
           <a:p>
             <a:fld id="{0E1AB97B-D0C7-4CCB-8568-F47C13D538D5}" type="datetimeFigureOut">
-              <a:t>13-Oct-26</a:t>
+              <a:t>14-Oct-26</a:t>
             </a:fld>
             <a:endParaRPr/>
           </a:p>
@@ -10011,10 +10089,13 @@
               </a:defRPr>
             </a:pPr>
             <a:r>
-              <a:rPr sz="1875">
+              <a:rPr sz="1875" dirty="0">
                 <a:solidFill>
                   <a:srgbClr val="333333"/>
                 </a:solidFill>
+                <a:highlight>
+                  <a:srgbClr val="FFFF00"/>
+                </a:highlight>
               </a:rPr>
               <a:t>A subnet is a group of devices whose IP addresses share the same network portion.</a:t>
             </a:r>
@@ -10076,12 +10157,28 @@
               </a:defRPr>
             </a:pPr>
             <a:r>
-              <a:rPr sz="1725" b="1">
+              <a:rPr sz="1725" b="1" dirty="0">
                 <a:solidFill>
                   <a:srgbClr val="23566A"/>
                 </a:solidFill>
               </a:rPr>
-              <a:t>Mask 255.255.255.0 (/24): the first three parts of the IP address identify the network.</a:t>
+              <a:t>Mask 255.255.255.0 (/24): the first three parts of the IP address identify the network</a:t>
+            </a:r>
+            <a:r>
+              <a:rPr lang="en-US" sz="1725" b="1" dirty="0">
+                <a:solidFill>
+                  <a:srgbClr val="23566A"/>
+                </a:solidFill>
+              </a:rPr>
+              <a:t>(subnet)</a:t>
+            </a:r>
+            <a:r>
+              <a:rPr sz="1725" b="1" dirty="0">
+                <a:solidFill>
+                  <a:srgbClr val="23566A"/>
+                </a:solidFill>
+              </a:rPr>
+              <a:t>.</a:t>
             </a:r>
           </a:p>
           <a:p>
@@ -10094,7 +10191,7 @@
               </a:defRPr>
             </a:pPr>
             <a:r>
-              <a:rPr sz="1725" b="1">
+              <a:rPr sz="1725" b="1" dirty="0">
                 <a:solidFill>
                   <a:srgbClr val="23566A"/>
                 </a:solidFill>
@@ -10112,7 +10209,7 @@
               </a:defRPr>
             </a:pPr>
             <a:r>
-              <a:rPr sz="1725" b="1">
+              <a:rPr sz="1725" b="1" dirty="0">
                 <a:solidFill>
                   <a:srgbClr val="23566A"/>
                 </a:solidFill>
@@ -12196,7 +12293,7 @@
               </a:defRPr>
             </a:pPr>
             <a:r>
-              <a:rPr sz="1575" b="1">
+              <a:rPr sz="1575" b="1" dirty="0">
                 <a:solidFill>
                   <a:srgbClr val="18A7CC"/>
                 </a:solidFill>
@@ -12225,8 +12322,8 @@
         </p:nvSpPr>
         <p:spPr>
           <a:xfrm>
-            <a:off x="781050" y="2171700"/>
-            <a:ext cx="4762500" cy="981075"/>
+            <a:off x="781049" y="2171700"/>
+            <a:ext cx="4290975" cy="981075"/>
           </a:xfrm>
           <a:prstGeom prst="rect">
             <a:avLst/>
@@ -12254,7 +12351,7 @@
               </a:defRPr>
             </a:pPr>
             <a:r>
-              <a:rPr sz="1650" b="0">
+              <a:rPr sz="1650" b="0" dirty="0">
                 <a:solidFill>
                   <a:srgbClr val="333333"/>
                 </a:solidFill>
@@ -12312,7 +12409,7 @@
               </a:defRPr>
             </a:pPr>
             <a:r>
-              <a:rPr sz="1575" b="1">
+              <a:rPr sz="1575" b="1" dirty="0">
                 <a:solidFill>
                   <a:srgbClr val="18A7CC"/>
                 </a:solidFill>
@@ -12320,8 +12417,27 @@
                 <a:ea typeface="Trebuchet MS"/>
                 <a:cs typeface="Trebuchet MS"/>
               </a:rPr>
-              <a:t>Different network</a:t>
-            </a:r>
+              <a:t>Different </a:t>
+            </a:r>
+            <a:r>
+              <a:rPr lang="en-US" sz="1575" b="1" dirty="0">
+                <a:solidFill>
+                  <a:srgbClr val="18A7CC"/>
+                </a:solidFill>
+                <a:latin typeface="Trebuchet MS"/>
+                <a:ea typeface="Trebuchet MS"/>
+                <a:cs typeface="Trebuchet MS"/>
+              </a:rPr>
+              <a:t>subnet</a:t>
+            </a:r>
+            <a:endParaRPr sz="1575" b="1" dirty="0">
+              <a:solidFill>
+                <a:srgbClr val="18A7CC"/>
+              </a:solidFill>
+              <a:latin typeface="Trebuchet MS"/>
+              <a:ea typeface="Trebuchet MS"/>
+              <a:cs typeface="Trebuchet MS"/>
+            </a:endParaRPr>
           </a:p>
         </p:txBody>
       </p:sp>
@@ -12342,7 +12458,7 @@
         <p:spPr>
           <a:xfrm>
             <a:off x="781050" y="3505200"/>
-            <a:ext cx="4762500" cy="981075"/>
+            <a:ext cx="4086173" cy="981075"/>
           </a:xfrm>
           <a:prstGeom prst="rect">
             <a:avLst/>
@@ -12370,7 +12486,7 @@
               </a:defRPr>
             </a:pPr>
             <a:r>
-              <a:rPr sz="1650" b="0">
+              <a:rPr sz="1650" b="0" dirty="0">
                 <a:solidFill>
                   <a:srgbClr val="333333"/>
                 </a:solidFill>
@@ -12458,7 +12574,7 @@
         <p:spPr>
           <a:xfrm>
             <a:off x="781050" y="4838700"/>
-            <a:ext cx="4762500" cy="981075"/>
+            <a:ext cx="4086173" cy="981075"/>
           </a:xfrm>
           <a:prstGeom prst="rect">
             <a:avLst/>
@@ -12486,7 +12602,7 @@
               </a:defRPr>
             </a:pPr>
             <a:r>
-              <a:rPr sz="1650" b="0">
+              <a:rPr sz="1650" b="0" dirty="0">
                 <a:solidFill>
                   <a:srgbClr val="333333"/>
                 </a:solidFill>
@@ -12501,10 +12617,10 @@
       </p:sp>
       <p:pic>
         <p:nvPicPr>
-          <p:cNvPr id="77" name="Picture 76">
-            <a:extLst>
-              <a:ext uri="{FF2B5EF4-FFF2-40B4-BE49-F238E27FC236}">
-                <a16:creationId xmlns:a16="http://schemas.microsoft.com/office/drawing/2014/main" id="{B8FAD646-D99C-497E-94BD-E84B1AEED594}"/>
+          <p:cNvPr id="5" name="Picture 4">
+            <a:extLst>
+              <a:ext uri="{FF2B5EF4-FFF2-40B4-BE49-F238E27FC236}">
+                <a16:creationId xmlns:a16="http://schemas.microsoft.com/office/drawing/2014/main" id="{AE124AA7-9701-D3C5-CA9E-87D6F3BE66CF}"/>
               </a:ext>
             </a:extLst>
           </p:cNvPr>
@@ -12515,12 +12631,14 @@
         </p:nvPicPr>
         <p:blipFill>
           <a:blip r:embed="rId3"/>
-          <a:stretch/>
+          <a:stretch>
+            <a:fillRect/>
+          </a:stretch>
         </p:blipFill>
         <p:spPr>
           <a:xfrm>
-            <a:off x="6675638" y="1857375"/>
-            <a:ext cx="3460348" cy="3905250"/>
+            <a:off x="5175741" y="1218664"/>
+            <a:ext cx="6567525" cy="4383632"/>
           </a:xfrm>
           <a:prstGeom prst="rect">
             <a:avLst/>
